--- a/01-foundations-scenarios-and-tools/00-pre-session/slides-foundations.pptx
+++ b/01-foundations-scenarios-and-tools/00-pre-session/slides-foundations.pptx
@@ -4678,7 +4678,15 @@
                 </a:pPr>
                 <a:r>
                   <a:rPr/>
-                  <a:t>The cross term vanishes, because conditioning on </a:t>
+                  <a:t>The cross term vanishes by the </a:t>
+                </a:r>
+                <a:r>
+                  <a:rPr b="1"/>
+                  <a:t>tower property</a:t>
+                </a:r>
+                <a:r>
+                  <a:rPr/>
+                  <a:t> — condition on </a:t>
                 </a:r>
                 <a14:m>
                   <m:oMath xmlns:m="http://schemas.openxmlformats.org/officeDocument/2006/math">
@@ -4689,7 +4697,66 @@
                 </a14:m>
                 <a:r>
                   <a:rPr/>
-                  <a:t> first:</a:t>
+                  <a:t> first, and </a:t>
+                </a:r>
+                <a14:m>
+                  <m:oMath xmlns:m="http://schemas.openxmlformats.org/officeDocument/2006/math">
+                    <m:r>
+                      <m:rPr>
+                        <m:sty m:val="p"/>
+                        <m:scr m:val="double-struck"/>
+                      </m:rPr>
+                      <m:t>E</m:t>
+                    </m:r>
+                    <m:d>
+                      <m:dPr>
+                        <m:begChr m:val="["/>
+                        <m:sepChr m:val=""/>
+                        <m:endChr m:val="]"/>
+                        <m:grow/>
+                      </m:dPr>
+                      <m:e>
+                        <m:r>
+                          <m:t>Y</m:t>
+                        </m:r>
+                        <m:r>
+                          <m:rPr>
+                            <m:sty m:val="p"/>
+                          </m:rPr>
+                          <m:t>∣</m:t>
+                        </m:r>
+                        <m:r>
+                          <m:t>X</m:t>
+                        </m:r>
+                      </m:e>
+                    </m:d>
+                    <m:r>
+                      <m:rPr>
+                        <m:sty m:val="p"/>
+                      </m:rPr>
+                      <m:t>−</m:t>
+                    </m:r>
+                    <m:r>
+                      <m:t>g</m:t>
+                    </m:r>
+                    <m:d>
+                      <m:dPr>
+                        <m:begChr m:val="("/>
+                        <m:sepChr m:val=""/>
+                        <m:endChr m:val=")"/>
+                        <m:grow/>
+                      </m:dPr>
+                      <m:e>
+                        <m:r>
+                          <m:t>X</m:t>
+                        </m:r>
+                      </m:e>
+                    </m:d>
+                  </m:oMath>
+                </a14:m>
+                <a:r>
+                  <a:rPr/>
+                  <a:t> passes outside the inner expectation:</a:t>
                 </a:r>
               </a:p>
               <a:p>
@@ -4892,6 +4959,103 @@
                     </m:oMath>
                   </m:oMathPara>
                 </a14:m>
+              </a:p>
+              <a:p>
+                <a:pPr lvl="0" indent="0" marL="0">
+                  <a:buNone/>
+                </a:pPr>
+                <a:r>
+                  <a:rPr/>
+                  <a:t>Also called the </a:t>
+                </a:r>
+                <a:r>
+                  <a:rPr b="1"/>
+                  <a:t>law of iterated expectations</a:t>
+                </a:r>
+                <a:r>
+                  <a:rPr/>
+                  <a:t>: </a:t>
+                </a:r>
+                <a14:m>
+                  <m:oMath xmlns:m="http://schemas.openxmlformats.org/officeDocument/2006/math">
+                    <m:r>
+                      <m:rPr>
+                        <m:sty m:val="p"/>
+                        <m:scr m:val="double-struck"/>
+                      </m:rPr>
+                      <m:t>E</m:t>
+                    </m:r>
+                    <m:d>
+                      <m:dPr>
+                        <m:begChr m:val="["/>
+                        <m:sepChr m:val=""/>
+                        <m:endChr m:val="]"/>
+                        <m:grow/>
+                      </m:dPr>
+                      <m:e>
+                        <m:r>
+                          <m:t>Z</m:t>
+                        </m:r>
+                      </m:e>
+                    </m:d>
+                    <m:r>
+                      <m:rPr>
+                        <m:sty m:val="p"/>
+                      </m:rPr>
+                      <m:t>=</m:t>
+                    </m:r>
+                    <m:r>
+                      <m:rPr>
+                        <m:sty m:val="p"/>
+                        <m:scr m:val="double-struck"/>
+                      </m:rPr>
+                      <m:t>E</m:t>
+                    </m:r>
+                    <m:d>
+                      <m:dPr>
+                        <m:begChr m:val="["/>
+                        <m:sepChr m:val=""/>
+                        <m:endChr m:val="]"/>
+                        <m:grow/>
+                      </m:dPr>
+                      <m:e>
+                        <m:r>
+                          <m:rPr>
+                            <m:sty m:val="p"/>
+                            <m:scr m:val="double-struck"/>
+                          </m:rPr>
+                          <m:t>E</m:t>
+                        </m:r>
+                        <m:d>
+                          <m:dPr>
+                            <m:begChr m:val="["/>
+                            <m:sepChr m:val=""/>
+                            <m:endChr m:val="]"/>
+                            <m:grow/>
+                          </m:dPr>
+                          <m:e>
+                            <m:r>
+                              <m:t>Z</m:t>
+                            </m:r>
+                            <m:r>
+                              <m:rPr>
+                                <m:sty m:val="p"/>
+                              </m:rPr>
+                              <m:t>∣</m:t>
+                            </m:r>
+                            <m:r>
+                              <m:t>X</m:t>
+                            </m:r>
+                          </m:e>
+                        </m:d>
+                      </m:e>
+                    </m:d>
+                  </m:oMath>
+                </a14:m>
+                <a:r>
+                  <a:rPr/>
+                  <a:t>. You will be asked to name it.</a:t>
+                </a:r>
               </a:p>
             </p:txBody>
           </p:sp>
